--- a/_slides/remanies/15. FIC_slides.pptx
+++ b/_slides/remanies/15. FIC_slides.pptx
@@ -899,6 +899,12 @@
               <a:t> s'exécute toujours, exception ou non. Il suffit d'y penser à chaque fichier, et c'est précisément là que tout le monde finit par oublier.</a:t>
             </a:r>
           </a:p>
+          <a:p>
+            <a:r>
+              <a:rPr lang="fr-BE" dirty="0"/>
+              <a:t>Le code complet, à exécuter : demos, classe demo.fic.slides.UnFluxOuvertSeFerme.</a:t>
+            </a:r>
+          </a:p>
         </p:txBody>
       </p:sp>
       <p:sp>
@@ -1051,6 +1057,12 @@
               <a:t> avec ressources, dans les exemples de ce deck comme dans vos exercices.</a:t>
             </a:r>
           </a:p>
+          <a:p>
+            <a:r>
+              <a:rPr lang="fr-BE" dirty="0"/>
+              <a:t>Le code complet, à exécuter : demos, classe demo.fic.slides.UnFluxOuvertSeFerme.</a:t>
+            </a:r>
+          </a:p>
         </p:txBody>
       </p:sp>
       <p:sp>
@@ -1172,6 +1184,12 @@
               <a:t>Le choix entre traiter et déclarer vous revient dans les exercices. Les signatures imposées par le fascicule l'indiquent souvent.</a:t>
             </a:r>
           </a:p>
+          <a:p>
+            <a:r>
+              <a:rPr lang="fr-BE" dirty="0"/>
+              <a:t>Le code complet, à exécuter : demos, classe demo.fic.slides.IOExceptionUneExceptionControlee.</a:t>
+            </a:r>
+          </a:p>
         </p:txBody>
       </p:sp>
       <p:sp>
@@ -1397,6 +1415,12 @@
               <a:t> dit après coup si quelque chose a mal tourné.</a:t>
             </a:r>
           </a:p>
+          <a:p>
+            <a:r>
+              <a:rPr lang="fr-BE" dirty="0"/>
+              <a:t>Le code complet, à exécuter : demos, classe demo.fic.slides.EcrireEtRelireUnTexte.</a:t>
+            </a:r>
+          </a:p>
         </p:txBody>
       </p:sp>
       <p:sp>
@@ -1540,6 +1564,12 @@
               <a:t>.</a:t>
             </a:r>
           </a:p>
+          <a:p>
+            <a:r>
+              <a:rPr lang="fr-BE" dirty="0"/>
+              <a:t>Le code complet, à exécuter : demos, classe demo.fic.slides.EcrireEtRelireUnTexte.</a:t>
+            </a:r>
+          </a:p>
         </p:txBody>
       </p:sp>
       <p:sp>
@@ -1638,6 +1668,12 @@
               <a:t> à sa place.</a:t>
             </a:r>
           </a:p>
+          <a:p>
+            <a:r>
+              <a:rPr lang="fr-BE" dirty="0"/>
+              <a:t>Le code complet, à exécuter : demos, classe demo.fic.slides.EcrireEtRelireUnTexte.</a:t>
+            </a:r>
+          </a:p>
         </p:txBody>
       </p:sp>
       <p:sp>
@@ -1768,6 +1804,12 @@
               <a:t>.</a:t>
             </a:r>
           </a:p>
+          <a:p>
+            <a:r>
+              <a:rPr lang="fr-BE" dirty="0"/>
+              <a:t>Le code complet, à exécuter : demos, classe demo.fic.slides.UnNomNEstPasUnFichier.</a:t>
+            </a:r>
+          </a:p>
         </p:txBody>
       </p:sp>
       <p:sp>
@@ -1937,6 +1979,12 @@
               <a:t>, apparu avec Java 11.</a:t>
             </a:r>
           </a:p>
+          <a:p>
+            <a:r>
+              <a:rPr lang="fr-BE" dirty="0"/>
+              <a:t>Le code complet, à exécuter : demos, classe demo.fic.slides.UnNomNEstPasUnFichier.</a:t>
+            </a:r>
+          </a:p>
         </p:txBody>
       </p:sp>
       <p:sp>
@@ -2434,6 +2482,12 @@
               <a:t> : le programme qui relit doit disposer de la classe de l'objet écrit, ce qui n'est pas garanti.</a:t>
             </a:r>
           </a:p>
+          <a:p>
+            <a:r>
+              <a:rPr lang="fr-BE" dirty="0"/>
+              <a:t>Le code complet, à exécuter : demos, classe demo.fic.slides.LesFluxDObjets.</a:t>
+            </a:r>
+          </a:p>
         </p:txBody>
       </p:sp>
       <p:sp>
@@ -2514,6 +2568,12 @@
               <a:t>Les classes du JDK qui portent des données sont presque toutes déjà étiquetées. C'est pourquoi une liste de chaînes ou de dates s'écrit sans qu'on y pense, alors qu'une classe écrite par vous doit le déclarer.</a:t>
             </a:r>
           </a:p>
+          <a:p>
+            <a:r>
+              <a:rPr lang="fr-BE" dirty="0"/>
+              <a:t>Le code complet, à exécuter : demos, classe demo.fic.slides.LesFluxDObjets.</a:t>
+            </a:r>
+          </a:p>
         </p:txBody>
       </p:sp>
       <p:sp>
@@ -3119,6 +3179,12 @@
               <a:t>Attention au mot : ces flux n'ont rien à voir avec les *streams* de la slide facultative du module LAM, qui traitent des collections.</a:t>
             </a:r>
           </a:p>
+          <a:p>
+            <a:r>
+              <a:rPr lang="fr-BE" dirty="0"/>
+              <a:t>Le code complet, à exécuter : demos, classe demo.fic.slides.VousEcrivezDejaDansUnFlux.</a:t>
+            </a:r>
+          </a:p>
         </p:txBody>
       </p:sp>
       <p:sp>
@@ -3774,6 +3840,12 @@
             </a:r>
             <a:r>
               <a:t>. Vous le retrouverez à la section 4.</a:t>
+            </a:r>
+          </a:p>
+          <a:p>
+            <a:r>
+              <a:rPr lang="fr-BE" dirty="0"/>
+              <a:t>Le code complet, à exécuter : demos, classe demo.fic.slides.LesFluxSEmboitent.</a:t>
             </a:r>
           </a:p>
         </p:txBody>
@@ -7317,6 +7389,7 @@
           </a:p>
           <a:p>
             <a:r>
+              <a:rPr/>
               <a:t>Fichiers</a:t>
             </a:r>
           </a:p>
@@ -8811,15 +8884,15 @@
             </a:pPr>
             <a:r>
               <a:rPr sz="2800" dirty="0"/>
-              <a:t>La </a:t>
+              <a:t/>
             </a:r>
             <a:r>
               <a:rPr sz="2800" dirty="0" err="1"/>
-              <a:t>classe</a:t>
+              <a:t/>
             </a:r>
             <a:r>
               <a:rPr sz="2800" dirty="0"/>
-              <a:t> </a:t>
+              <a:t/>
             </a:r>
             <a:r>
               <a:rPr sz="2400" dirty="0" err="1">
@@ -8832,39 +8905,7 @@
             </a:r>
             <a:r>
               <a:rPr sz="2800" dirty="0"/>
-              <a:t> </a:t>
-            </a:r>
-            <a:r>
-              <a:rPr lang="nl-BE" sz="2800" dirty="0"/>
-              <a:t>doit être</a:t>
-            </a:r>
-            <a:r>
-              <a:rPr sz="2800" dirty="0"/>
-              <a:t> contrôlée : trait</a:t>
-            </a:r>
-            <a:r>
-              <a:rPr lang="nl-BE" sz="2800" dirty="0"/>
-              <a:t>ée</a:t>
-            </a:r>
-            <a:r>
-              <a:rPr sz="2800" dirty="0"/>
-              <a:t> </a:t>
-            </a:r>
-            <a:r>
-              <a:rPr sz="2800" dirty="0" err="1"/>
-              <a:t>ou</a:t>
-            </a:r>
-            <a:r>
-              <a:rPr sz="2800" dirty="0"/>
-              <a:t> </a:t>
-            </a:r>
-            <a:r>
-              <a:rPr sz="2800" dirty="0" err="1"/>
-              <a:t>déclar</a:t>
-            </a:r>
-            <a:r>
-              <a:rPr lang="nl-BE" sz="2800" dirty="0"/>
-              <a:t>ée</a:t>
+              <a:t> est une exception contrôlée : elle doit être traitée ou déclarée</a:t>
             </a:r>
             <a:endParaRPr sz="2800" dirty="0"/>
           </a:p>

--- a/_slides/remanies/15. FIC_slides.pptx
+++ b/_slides/remanies/15. FIC_slides.pptx
@@ -2565,7 +2565,7 @@
           </a:p>
           <a:p>
             <a:r>
-              <a:t>Les classes du JDK qui portent des données sont presque toutes déjà étiquetées. C'est pourquoi une liste de chaînes ou de dates s'écrit sans qu'on y pense, alors qu'une classe écrite par vous doit le déclarer.</a:t>
+              <a:t>Les classes du JDK qui contiennent des données sont presque toutes déjà étiquetées. C'est pourquoi une liste de chaînes ou de dates s'écrit sans qu'on y pense, alors qu'une classe écrite par vous doit le déclarer.</a:t>
             </a:r>
           </a:p>
           <a:p>
